--- a/llm_token_capacity_project/outputs/reports/llm_token_capacity_samsung_style_en_2026_2030.pptx
+++ b/llm_token_capacity_project/outputs/reports/llm_token_capacity_samsung_style_en_2026_2030.pptx
@@ -172,16 +172,16 @@
                   <c:v>0.117</c:v>
                 </c:pt>
                 <c:pt idx="1">
-                  <c:v>0.286</c:v>
+                  <c:v>0.287</c:v>
                 </c:pt>
                 <c:pt idx="2">
-                  <c:v>0.546</c:v>
+                  <c:v>0.552</c:v>
                 </c:pt>
                 <c:pt idx="3">
-                  <c:v>0.934</c:v>
+                  <c:v>0.95</c:v>
                 </c:pt>
                 <c:pt idx="4">
-                  <c:v>1.494</c:v>
+                  <c:v>1.527</c:v>
                 </c:pt>
               </c:numCache>
             </c:numRef>
@@ -235,16 +235,16 @@
                   <c:v>0.208</c:v>
                 </c:pt>
                 <c:pt idx="1">
-                  <c:v>0.516</c:v>
+                  <c:v>0.519</c:v>
                 </c:pt>
                 <c:pt idx="2">
-                  <c:v>1.006</c:v>
+                  <c:v>1.018</c:v>
                 </c:pt>
                 <c:pt idx="3">
-                  <c:v>1.757</c:v>
+                  <c:v>1.786</c:v>
                 </c:pt>
                 <c:pt idx="4">
-                  <c:v>2.872</c:v>
+                  <c:v>2.934</c:v>
                 </c:pt>
               </c:numCache>
             </c:numRef>
@@ -298,16 +298,16 @@
                   <c:v>0.302</c:v>
                 </c:pt>
                 <c:pt idx="1">
-                  <c:v>0.779</c:v>
+                  <c:v>0.784</c:v>
                 </c:pt>
                 <c:pt idx="2">
-                  <c:v>1.575</c:v>
+                  <c:v>1.592</c:v>
                 </c:pt>
                 <c:pt idx="3">
-                  <c:v>2.84</c:v>
+                  <c:v>2.887</c:v>
                 </c:pt>
                 <c:pt idx="4">
-                  <c:v>4.79</c:v>
+                  <c:v>4.892</c:v>
                 </c:pt>
               </c:numCache>
             </c:numRef>
@@ -474,16 +474,16 @@
                   <c:v>0.586840240711296</c:v>
                 </c:pt>
                 <c:pt idx="1">
-                  <c:v>0.53513286253056</c:v>
+                  <c:v>0.5462989080192</c:v>
                 </c:pt>
                 <c:pt idx="2">
-                  <c:v>0.4022866197504</c:v>
+                  <c:v>0.4271839955712</c:v>
                 </c:pt>
                 <c:pt idx="3">
-                  <c:v>0.372288096107136</c:v>
+                  <c:v>0.391550950429056</c:v>
                 </c:pt>
                 <c:pt idx="4">
-                  <c:v>0.31830324515136</c:v>
+                  <c:v>0.325393026336</c:v>
                 </c:pt>
                 <c:pt idx="5">
                   <c:v>0.259801314859008</c:v>
@@ -3911,7 +3911,7 @@
               </a:defRPr>
             </a:pPr>
             <a:r>
-              <a:t>2.87Q</a:t>
+              <a:t>2.93Q</a:t>
             </a:r>
           </a:p>
         </p:txBody>
@@ -4121,7 +4121,7 @@
               </a:defRPr>
             </a:pPr>
             <a:r>
-              <a:t>2026-05-18</a:t>
+              <a:t>2026-05-26</a:t>
             </a:r>
           </a:p>
         </p:txBody>
@@ -5277,7 +5277,7 @@
               </a:defRPr>
             </a:pPr>
             <a:r>
-              <a:t>2026-05-18</a:t>
+              <a:t>2026-05-26</a:t>
             </a:r>
           </a:p>
         </p:txBody>
@@ -5648,7 +5648,7 @@
               </a:defRPr>
             </a:pPr>
             <a:r>
-              <a:t>Base case reaches 2.87Q generated output tokens/day by 2030.</a:t>
+              <a:t>Base case reaches 2.93Q generated output tokens/day by 2030.</a:t>
             </a:r>
           </a:p>
         </p:txBody>
@@ -6133,7 +6133,7 @@
               </a:defRPr>
             </a:pPr>
             <a:r>
-              <a:t>2026-05-18</a:t>
+              <a:t>2026-05-26</a:t>
             </a:r>
           </a:p>
         </p:txBody>
@@ -6510,7 +6510,7 @@
               </a:defRPr>
             </a:pPr>
             <a:r>
-              <a:t>Base 2026-2030 growth: 13.8x</a:t>
+              <a:t>Base 2026-2030 growth: 14.1x</a:t>
             </a:r>
           </a:p>
         </p:txBody>
@@ -6660,7 +6660,7 @@
               </a:defRPr>
             </a:pPr>
             <a:r>
-              <a:t>2026-05-18</a:t>
+              <a:t>2026-05-26</a:t>
             </a:r>
           </a:p>
         </p:txBody>
@@ -7294,7 +7294,7 @@
               </a:defRPr>
             </a:pPr>
             <a:r>
-              <a:t>2026-05-18</a:t>
+              <a:t>2026-05-26</a:t>
             </a:r>
           </a:p>
         </p:txBody>
@@ -8488,7 +8488,7 @@
               </a:defRPr>
             </a:pPr>
             <a:r>
-              <a:t>2026-05-18</a:t>
+              <a:t>2026-05-26</a:t>
             </a:r>
           </a:p>
         </p:txBody>
@@ -9070,7 +9070,7 @@
               </a:defRPr>
             </a:pPr>
             <a:r>
-              <a:t>2026-05-18</a:t>
+              <a:t>2026-05-26</a:t>
             </a:r>
           </a:p>
         </p:txBody>
@@ -9939,7 +9939,7 @@
               </a:defRPr>
             </a:pPr>
             <a:r>
-              <a:t>2026-05-18</a:t>
+              <a:t>2026-05-26</a:t>
             </a:r>
           </a:p>
         </p:txBody>
@@ -10713,7 +10713,7 @@
               </a:defRPr>
             </a:pPr>
             <a:r>
-              <a:t>2026-05-18</a:t>
+              <a:t>2026-05-26</a:t>
             </a:r>
           </a:p>
         </p:txBody>
@@ -11466,7 +11466,7 @@
               </a:defRPr>
             </a:pPr>
             <a:r>
-              <a:t>2026-05-18</a:t>
+              <a:t>2026-05-26</a:t>
             </a:r>
           </a:p>
         </p:txBody>

--- a/llm_token_capacity_project/outputs/reports/llm_token_capacity_samsung_style_en_2026_2030.pptx
+++ b/llm_token_capacity_project/outputs/reports/llm_token_capacity_samsung_style_en_2026_2030.pptx
@@ -169,19 +169,19 @@
                 <c:formatCode>General</c:formatCode>
                 <c:ptCount val="5"/>
                 <c:pt idx="0">
-                  <c:v>0.117</c:v>
+                  <c:v>0.155</c:v>
                 </c:pt>
                 <c:pt idx="1">
-                  <c:v>0.287</c:v>
+                  <c:v>0.306</c:v>
                 </c:pt>
                 <c:pt idx="2">
-                  <c:v>0.552</c:v>
+                  <c:v>0.473</c:v>
                 </c:pt>
                 <c:pt idx="3">
-                  <c:v>0.95</c:v>
+                  <c:v>0.656</c:v>
                 </c:pt>
                 <c:pt idx="4">
-                  <c:v>1.527</c:v>
+                  <c:v>0.853</c:v>
                 </c:pt>
               </c:numCache>
             </c:numRef>
@@ -232,19 +232,19 @@
                 <c:formatCode>General</c:formatCode>
                 <c:ptCount val="5"/>
                 <c:pt idx="0">
-                  <c:v>0.208</c:v>
+                  <c:v>0.201</c:v>
                 </c:pt>
                 <c:pt idx="1">
-                  <c:v>0.519</c:v>
+                  <c:v>0.404</c:v>
                 </c:pt>
                 <c:pt idx="2">
-                  <c:v>1.018</c:v>
+                  <c:v>0.638</c:v>
                 </c:pt>
                 <c:pt idx="3">
-                  <c:v>1.786</c:v>
+                  <c:v>0.903</c:v>
                 </c:pt>
                 <c:pt idx="4">
-                  <c:v>2.934</c:v>
+                  <c:v>1.199</c:v>
                 </c:pt>
               </c:numCache>
             </c:numRef>
@@ -295,19 +295,19 @@
                 <c:formatCode>General</c:formatCode>
                 <c:ptCount val="5"/>
                 <c:pt idx="0">
-                  <c:v>0.302</c:v>
+                  <c:v>0.231</c:v>
                 </c:pt>
                 <c:pt idx="1">
-                  <c:v>0.784</c:v>
+                  <c:v>0.48</c:v>
                 </c:pt>
                 <c:pt idx="2">
-                  <c:v>1.592</c:v>
+                  <c:v>0.783</c:v>
                 </c:pt>
                 <c:pt idx="3">
-                  <c:v>2.887</c:v>
+                  <c:v>1.143</c:v>
                 </c:pt>
                 <c:pt idx="4">
-                  <c:v>4.892</c:v>
+                  <c:v>1.565</c:v>
                 </c:pt>
               </c:numCache>
             </c:numRef>
@@ -441,22 +441,22 @@
                   <c:v>Google</c:v>
                 </c:pt>
                 <c:pt idx="2">
+                  <c:v>Microsoft</c:v>
+                </c:pt>
+                <c:pt idx="3">
+                  <c:v>Anthropic</c:v>
+                </c:pt>
+                <c:pt idx="4">
+                  <c:v>Tencent</c:v>
+                </c:pt>
+                <c:pt idx="5">
                   <c:v>Meta</c:v>
                 </c:pt>
-                <c:pt idx="3">
-                  <c:v>Microsoft</c:v>
-                </c:pt>
-                <c:pt idx="4">
-                  <c:v>Anthropic</c:v>
-                </c:pt>
-                <c:pt idx="5">
-                  <c:v>Alibaba</c:v>
-                </c:pt>
                 <c:pt idx="6">
-                  <c:v>Tencent</c:v>
+                  <c:v>xAI</c:v>
                 </c:pt>
                 <c:pt idx="7">
-                  <c:v>xAI</c:v>
+                  <c:v>Alibaba</c:v>
                 </c:pt>
                 <c:pt idx="8">
                   <c:v>DeepSeek</c:v>
@@ -471,31 +471,31 @@
                 <c:formatCode>General</c:formatCode>
                 <c:ptCount val="9"/>
                 <c:pt idx="0">
-                  <c:v>0.586840240711296</c:v>
+                  <c:v>0.304530475392</c:v>
                 </c:pt>
                 <c:pt idx="1">
-                  <c:v>0.5462989080192</c:v>
+                  <c:v>0.228679713216</c:v>
                 </c:pt>
                 <c:pt idx="2">
-                  <c:v>0.4271839955712</c:v>
+                  <c:v>0.208761841728</c:v>
                 </c:pt>
                 <c:pt idx="3">
-                  <c:v>0.391550950429056</c:v>
+                  <c:v>0.185774864256</c:v>
                 </c:pt>
                 <c:pt idx="4">
-                  <c:v>0.325393026336</c:v>
+                  <c:v>0.082114243776</c:v>
                 </c:pt>
                 <c:pt idx="5">
-                  <c:v>0.259801314859008</c:v>
+                  <c:v>0.08016026112</c:v>
                 </c:pt>
                 <c:pt idx="6">
-                  <c:v>0.167354927293824</c:v>
+                  <c:v>0.076351840704</c:v>
                 </c:pt>
                 <c:pt idx="7">
-                  <c:v>0.125620159296096</c:v>
+                  <c:v>0.027055767744</c:v>
                 </c:pt>
                 <c:pt idx="8">
-                  <c:v>0.104360160022272</c:v>
+                  <c:v>0.005694666768</c:v>
                 </c:pt>
               </c:numCache>
             </c:numRef>
@@ -3911,7 +3911,7 @@
               </a:defRPr>
             </a:pPr>
             <a:r>
-              <a:t>2.93Q</a:t>
+              <a:t>1.20Q</a:t>
             </a:r>
           </a:p>
         </p:txBody>
@@ -4121,7 +4121,7 @@
               </a:defRPr>
             </a:pPr>
             <a:r>
-              <a:t>2026-05-26</a:t>
+              <a:t>2026-05-27</a:t>
             </a:r>
           </a:p>
         </p:txBody>
@@ -5277,7 +5277,7 @@
               </a:defRPr>
             </a:pPr>
             <a:r>
-              <a:t>2026-05-26</a:t>
+              <a:t>2026-05-27</a:t>
             </a:r>
           </a:p>
         </p:txBody>
@@ -5648,7 +5648,7 @@
               </a:defRPr>
             </a:pPr>
             <a:r>
-              <a:t>Base case reaches 2.93Q generated output tokens/day by 2030.</a:t>
+              <a:t>Base case reaches 1.20Q generated output tokens/day by 2030.</a:t>
             </a:r>
           </a:p>
         </p:txBody>
@@ -5798,7 +5798,7 @@
               </a:defRPr>
             </a:pPr>
             <a:r>
-              <a:t>The largest 2030 contributors are OpenAI, Google, Meta.</a:t>
+              <a:t>The largest 2030 contributors are OpenAI, Google, Microsoft.</a:t>
             </a:r>
           </a:p>
         </p:txBody>
@@ -6133,7 +6133,7 @@
               </a:defRPr>
             </a:pPr>
             <a:r>
-              <a:t>2026-05-26</a:t>
+              <a:t>2026-05-27</a:t>
             </a:r>
           </a:p>
         </p:txBody>
@@ -6309,7 +6309,7 @@
               </a:defRPr>
             </a:pPr>
             <a:r>
-              <a:t>Bull, Base, and Bear cases are built from deployment speed, MoE optimization, inference power share, and utilization assumptions.</a:t>
+              <a:t>Bull, Base, and Bear cases vary operational deployment speed and inference power allocation; TPS/MW remains a selected benchmark proxy.</a:t>
             </a:r>
           </a:p>
         </p:txBody>
@@ -6460,7 +6460,7 @@
               </a:defRPr>
             </a:pPr>
             <a:r>
-              <a:t>The gap between cases is driven by serving-stack efficiency, MoE routing, and real utilization.</a:t>
+              <a:t>The gap between cases is driven by operational power deployment and inference allocation only.</a:t>
             </a:r>
           </a:p>
           <a:p>
@@ -6510,7 +6510,7 @@
               </a:defRPr>
             </a:pPr>
             <a:r>
-              <a:t>Base 2026-2030 growth: 14.1x</a:t>
+              <a:t>Base 2026-2030 growth: 6.0x</a:t>
             </a:r>
           </a:p>
         </p:txBody>
@@ -6660,7 +6660,7 @@
               </a:defRPr>
             </a:pPr>
             <a:r>
-              <a:t>2026-05-26</a:t>
+              <a:t>2026-05-27</a:t>
             </a:r>
           </a:p>
         </p:txBody>
@@ -7294,7 +7294,7 @@
               </a:defRPr>
             </a:pPr>
             <a:r>
-              <a:t>2026-05-26</a:t>
+              <a:t>2026-05-27</a:t>
             </a:r>
           </a:p>
         </p:txBody>
@@ -8250,7 +8250,7 @@
               </a:defRPr>
             </a:pPr>
             <a:r>
-              <a:t>tokens/MW and utilization</a:t>
+              <a:t>selected tokens/MW</a:t>
             </a:r>
           </a:p>
         </p:txBody>
@@ -8285,7 +8285,7 @@
               </a:defRPr>
             </a:pPr>
             <a:r>
-              <a:t>output tokens/day = inference GW x 1,000 x output tokens/sec/MW x utilization x 86,400</a:t>
+              <a:t>output tokens/day = inference GW x 1,000 x selected output tokens/sec/MW x 86,400</a:t>
             </a:r>
           </a:p>
         </p:txBody>
@@ -8338,7 +8338,7 @@
               </a:defRPr>
             </a:pPr>
             <a:r>
-              <a:t>Inference share is a capacity allocation variable; utilization is the operating conversion from installed serving capacity to traffic.</a:t>
+              <a:t>Inference share is a capacity allocation variable; output TPS/MW is selected from a fixed-condition InferenceX proxy table.</a:t>
             </a:r>
           </a:p>
         </p:txBody>
@@ -8488,7 +8488,7 @@
               </a:defRPr>
             </a:pPr>
             <a:r>
-              <a:t>2026-05-26</a:t>
+              <a:t>2026-05-27</a:t>
             </a:r>
           </a:p>
         </p:txBody>
@@ -9070,7 +9070,7 @@
               </a:defRPr>
             </a:pPr>
             <a:r>
-              <a:t>2026-05-26</a:t>
+              <a:t>2026-05-27</a:t>
             </a:r>
           </a:p>
         </p:txBody>
@@ -9939,7 +9939,7 @@
               </a:defRPr>
             </a:pPr>
             <a:r>
-              <a:t>2026-05-26</a:t>
+              <a:t>2026-05-27</a:t>
             </a:r>
           </a:p>
         </p:txBody>
@@ -10713,7 +10713,7 @@
               </a:defRPr>
             </a:pPr>
             <a:r>
-              <a:t>2026-05-26</a:t>
+              <a:t>2026-05-27</a:t>
             </a:r>
           </a:p>
         </p:txBody>
@@ -11466,7 +11466,7 @@
               </a:defRPr>
             </a:pPr>
             <a:r>
-              <a:t>2026-05-26</a:t>
+              <a:t>2026-05-27</a:t>
             </a:r>
           </a:p>
         </p:txBody>

--- a/llm_token_capacity_project/outputs/reports/llm_token_capacity_samsung_style_en_2026_2030.pptx
+++ b/llm_token_capacity_project/outputs/reports/llm_token_capacity_samsung_style_en_2026_2030.pptx
@@ -169,19 +169,19 @@
                 <c:formatCode>General</c:formatCode>
                 <c:ptCount val="5"/>
                 <c:pt idx="0">
-                  <c:v>0.155</c:v>
+                  <c:v>0.063</c:v>
                 </c:pt>
                 <c:pt idx="1">
-                  <c:v>0.306</c:v>
+                  <c:v>0.121</c:v>
                 </c:pt>
                 <c:pt idx="2">
-                  <c:v>0.473</c:v>
+                  <c:v>0.185</c:v>
                 </c:pt>
                 <c:pt idx="3">
-                  <c:v>0.656</c:v>
+                  <c:v>0.255</c:v>
                 </c:pt>
                 <c:pt idx="4">
-                  <c:v>0.853</c:v>
+                  <c:v>0.33</c:v>
                 </c:pt>
               </c:numCache>
             </c:numRef>
@@ -232,19 +232,19 @@
                 <c:formatCode>General</c:formatCode>
                 <c:ptCount val="5"/>
                 <c:pt idx="0">
-                  <c:v>0.201</c:v>
+                  <c:v>0.121</c:v>
                 </c:pt>
                 <c:pt idx="1">
-                  <c:v>0.404</c:v>
+                  <c:v>0.239</c:v>
                 </c:pt>
                 <c:pt idx="2">
-                  <c:v>0.638</c:v>
+                  <c:v>0.375</c:v>
                 </c:pt>
                 <c:pt idx="3">
-                  <c:v>0.903</c:v>
+                  <c:v>0.529</c:v>
                 </c:pt>
                 <c:pt idx="4">
-                  <c:v>1.199</c:v>
+                  <c:v>0.7</c:v>
                 </c:pt>
               </c:numCache>
             </c:numRef>
@@ -295,19 +295,19 @@
                 <c:formatCode>General</c:formatCode>
                 <c:ptCount val="5"/>
                 <c:pt idx="0">
-                  <c:v>0.231</c:v>
+                  <c:v>0.182</c:v>
                 </c:pt>
                 <c:pt idx="1">
-                  <c:v>0.48</c:v>
+                  <c:v>0.374</c:v>
                 </c:pt>
                 <c:pt idx="2">
-                  <c:v>0.783</c:v>
+                  <c:v>0.608</c:v>
                 </c:pt>
                 <c:pt idx="3">
-                  <c:v>1.143</c:v>
+                  <c:v>0.887</c:v>
                 </c:pt>
                 <c:pt idx="4">
-                  <c:v>1.565</c:v>
+                  <c:v>1.212</c:v>
                 </c:pt>
               </c:numCache>
             </c:numRef>
@@ -447,10 +447,10 @@
                   <c:v>Anthropic</c:v>
                 </c:pt>
                 <c:pt idx="4">
-                  <c:v>Tencent</c:v>
+                  <c:v>Meta</c:v>
                 </c:pt>
                 <c:pt idx="5">
-                  <c:v>Meta</c:v>
+                  <c:v>Tencent</c:v>
                 </c:pt>
                 <c:pt idx="6">
                   <c:v>xAI</c:v>
@@ -471,31 +471,31 @@
                 <c:formatCode>General</c:formatCode>
                 <c:ptCount val="9"/>
                 <c:pt idx="0">
-                  <c:v>0.304530475392</c:v>
+                  <c:v>0.152265237696</c:v>
                 </c:pt>
                 <c:pt idx="1">
-                  <c:v>0.228679713216</c:v>
+                  <c:v>0.1372078279296</c:v>
                 </c:pt>
                 <c:pt idx="2">
-                  <c:v>0.208761841728</c:v>
+                  <c:v>0.1252571050368</c:v>
                 </c:pt>
                 <c:pt idx="3">
-                  <c:v>0.185774864256</c:v>
+                  <c:v>0.092887432128</c:v>
                 </c:pt>
                 <c:pt idx="4">
-                  <c:v>0.082114243776</c:v>
+                  <c:v>0.072144235008</c:v>
                 </c:pt>
                 <c:pt idx="5">
-                  <c:v>0.08016026112</c:v>
+                  <c:v>0.0492685462656</c:v>
                 </c:pt>
                 <c:pt idx="6">
-                  <c:v>0.076351840704</c:v>
+                  <c:v>0.0419935123872</c:v>
                 </c:pt>
                 <c:pt idx="7">
-                  <c:v>0.027055767744</c:v>
+                  <c:v>0.024350115456</c:v>
                 </c:pt>
                 <c:pt idx="8">
-                  <c:v>0.005694666768</c:v>
+                  <c:v>0.0048404526912</c:v>
                 </c:pt>
               </c:numCache>
             </c:numRef>
@@ -3911,7 +3911,7 @@
               </a:defRPr>
             </a:pPr>
             <a:r>
-              <a:t>1.20Q</a:t>
+              <a:t>0.70Q</a:t>
             </a:r>
           </a:p>
         </p:txBody>
@@ -5127,7 +5127,7 @@
               </a:defRPr>
             </a:pPr>
             <a:r>
-              <a:t>Workbook appendix: formula assumptions, token definitions, scenario sensitivity, InferenceX raw benchmark tables, source registry, and company-year forecast rows.</a:t>
+              <a:t>Workbook: core formula, public benchmark inputs, scenario inputs, calculations, outputs, checks, and an aggressive upside view.</a:t>
             </a:r>
           </a:p>
         </p:txBody>
@@ -5648,7 +5648,7 @@
               </a:defRPr>
             </a:pPr>
             <a:r>
-              <a:t>Base case reaches 1.20Q generated output tokens/day by 2030.</a:t>
+              <a:t>Base case reaches 0.70Q generated output tokens/day by 2030.</a:t>
             </a:r>
           </a:p>
         </p:txBody>
@@ -6309,7 +6309,7 @@
               </a:defRPr>
             </a:pPr>
             <a:r>
-              <a:t>Bull, Base, and Bear cases vary operational deployment speed and inference power allocation; TPS/MW remains a selected benchmark proxy.</a:t>
+              <a:t>Bull, Base, and Bear cases vary deployment, inference allocation, and the explicit commercial workload fit applied to a public TPS/MW reference.</a:t>
             </a:r>
           </a:p>
         </p:txBody>
@@ -6510,7 +6510,7 @@
               </a:defRPr>
             </a:pPr>
             <a:r>
-              <a:t>Base 2026-2030 growth: 6.0x</a:t>
+              <a:t>Base 2026-2030 growth: 5.8x</a:t>
             </a:r>
           </a:p>
         </p:txBody>

--- a/llm_token_capacity_project/outputs/reports/llm_token_capacity_samsung_style_en_2026_2030.pptx
+++ b/llm_token_capacity_project/outputs/reports/llm_token_capacity_samsung_style_en_2026_2030.pptx
@@ -169,19 +169,19 @@
                 <c:formatCode>General</c:formatCode>
                 <c:ptCount val="5"/>
                 <c:pt idx="0">
-                  <c:v>0.063</c:v>
+                  <c:v>0.054</c:v>
                 </c:pt>
                 <c:pt idx="1">
-                  <c:v>0.121</c:v>
+                  <c:v>0.108</c:v>
                 </c:pt>
                 <c:pt idx="2">
-                  <c:v>0.185</c:v>
+                  <c:v>0.173</c:v>
                 </c:pt>
                 <c:pt idx="3">
-                  <c:v>0.255</c:v>
+                  <c:v>0.247</c:v>
                 </c:pt>
                 <c:pt idx="4">
-                  <c:v>0.33</c:v>
+                  <c:v>0.332</c:v>
                 </c:pt>
               </c:numCache>
             </c:numRef>
@@ -232,16 +232,16 @@
                 <c:formatCode>General</c:formatCode>
                 <c:ptCount val="5"/>
                 <c:pt idx="0">
-                  <c:v>0.121</c:v>
+                  <c:v>0.103</c:v>
                 </c:pt>
                 <c:pt idx="1">
-                  <c:v>0.239</c:v>
+                  <c:v>0.212</c:v>
                 </c:pt>
                 <c:pt idx="2">
-                  <c:v>0.375</c:v>
+                  <c:v>0.347</c:v>
                 </c:pt>
                 <c:pt idx="3">
-                  <c:v>0.529</c:v>
+                  <c:v>0.51</c:v>
                 </c:pt>
                 <c:pt idx="4">
                   <c:v>0.7</c:v>
@@ -295,19 +295,19 @@
                 <c:formatCode>General</c:formatCode>
                 <c:ptCount val="5"/>
                 <c:pt idx="0">
-                  <c:v>0.182</c:v>
+                  <c:v>0.155</c:v>
                 </c:pt>
                 <c:pt idx="1">
-                  <c:v>0.374</c:v>
+                  <c:v>0.332</c:v>
                 </c:pt>
                 <c:pt idx="2">
-                  <c:v>0.608</c:v>
+                  <c:v>0.562</c:v>
                 </c:pt>
                 <c:pt idx="3">
-                  <c:v>0.887</c:v>
+                  <c:v>0.852</c:v>
                 </c:pt>
                 <c:pt idx="4">
-                  <c:v>1.212</c:v>
+                  <c:v>1.207</c:v>
                 </c:pt>
               </c:numCache>
             </c:numRef>
@@ -471,31 +471,31 @@
                 <c:formatCode>General</c:formatCode>
                 <c:ptCount val="9"/>
                 <c:pt idx="0">
-                  <c:v>0.152265237696</c:v>
+                  <c:v>0.144796272192</c:v>
                 </c:pt>
                 <c:pt idx="1">
-                  <c:v>0.1372078279296</c:v>
+                  <c:v>0.136534665312</c:v>
                 </c:pt>
                 <c:pt idx="2">
-                  <c:v>0.1252571050368</c:v>
+                  <c:v>0.121878050976</c:v>
                 </c:pt>
                 <c:pt idx="3">
-                  <c:v>0.092887432128</c:v>
+                  <c:v>0.0922039803072</c:v>
                 </c:pt>
                 <c:pt idx="4">
-                  <c:v>0.072144235008</c:v>
+                  <c:v>0.072169173504</c:v>
                 </c:pt>
                 <c:pt idx="5">
-                  <c:v>0.0492685462656</c:v>
+                  <c:v>0.0468519222816</c:v>
                 </c:pt>
                 <c:pt idx="6">
-                  <c:v>0.0419935123872</c:v>
+                  <c:v>0.039933737856</c:v>
                 </c:pt>
                 <c:pt idx="7">
                   <c:v>0.024350115456</c:v>
                 </c:pt>
                 <c:pt idx="8">
-                  <c:v>0.0048404526912</c:v>
+                  <c:v>0.0212140609632</c:v>
                 </c:pt>
               </c:numCache>
             </c:numRef>
@@ -6510,7 +6510,7 @@
               </a:defRPr>
             </a:pPr>
             <a:r>
-              <a:t>Base 2026-2030 growth: 5.8x</a:t>
+              <a:t>Base 2026-2030 growth: 6.8x</a:t>
             </a:r>
           </a:p>
         </p:txBody>
@@ -8285,7 +8285,7 @@
               </a:defRPr>
             </a:pPr>
             <a:r>
-              <a:t>output tokens/day = inference GW x 1,000 x selected output tokens/sec/MW x 86,400</a:t>
+              <a:t>output tokens/day = inference GW x 1,000 x fleet-weighted serving tokens/sec/MW x 86,400</a:t>
             </a:r>
           </a:p>
         </p:txBody>
@@ -8338,7 +8338,7 @@
               </a:defRPr>
             </a:pPr>
             <a:r>
-              <a:t>Inference share is a capacity allocation variable; output TPS/MW is selected from a fixed-condition InferenceX proxy table.</a:t>
+              <a:t>Inference share is a capacity allocation variable; output TPS/MW is weighted by H200/B200/GB200/purpose-built mix and workload fit.</a:t>
             </a:r>
           </a:p>
         </p:txBody>

--- a/llm_token_capacity_project/outputs/reports/llm_token_capacity_samsung_style_en_2026_2030.pptx
+++ b/llm_token_capacity_project/outputs/reports/llm_token_capacity_samsung_style_en_2026_2030.pptx
@@ -169,19 +169,19 @@
                 <c:formatCode>General</c:formatCode>
                 <c:ptCount val="5"/>
                 <c:pt idx="0">
-                  <c:v>0.054</c:v>
+                  <c:v>0.051</c:v>
                 </c:pt>
                 <c:pt idx="1">
-                  <c:v>0.108</c:v>
+                  <c:v>0.101</c:v>
                 </c:pt>
                 <c:pt idx="2">
-                  <c:v>0.173</c:v>
+                  <c:v>0.161</c:v>
                 </c:pt>
                 <c:pt idx="3">
-                  <c:v>0.247</c:v>
+                  <c:v>0.23</c:v>
                 </c:pt>
                 <c:pt idx="4">
-                  <c:v>0.332</c:v>
+                  <c:v>0.308</c:v>
                 </c:pt>
               </c:numCache>
             </c:numRef>
@@ -232,19 +232,19 @@
                 <c:formatCode>General</c:formatCode>
                 <c:ptCount val="5"/>
                 <c:pt idx="0">
-                  <c:v>0.103</c:v>
+                  <c:v>0.098</c:v>
                 </c:pt>
                 <c:pt idx="1">
-                  <c:v>0.212</c:v>
+                  <c:v>0.201</c:v>
                 </c:pt>
                 <c:pt idx="2">
-                  <c:v>0.347</c:v>
+                  <c:v>0.328</c:v>
                 </c:pt>
                 <c:pt idx="3">
-                  <c:v>0.51</c:v>
+                  <c:v>0.481</c:v>
                 </c:pt>
                 <c:pt idx="4">
-                  <c:v>0.7</c:v>
+                  <c:v>0.658</c:v>
                 </c:pt>
               </c:numCache>
             </c:numRef>
@@ -295,19 +295,19 @@
                 <c:formatCode>General</c:formatCode>
                 <c:ptCount val="5"/>
                 <c:pt idx="0">
-                  <c:v>0.155</c:v>
+                  <c:v>0.148</c:v>
                 </c:pt>
                 <c:pt idx="1">
-                  <c:v>0.332</c:v>
+                  <c:v>0.316</c:v>
                 </c:pt>
                 <c:pt idx="2">
-                  <c:v>0.562</c:v>
+                  <c:v>0.535</c:v>
                 </c:pt>
                 <c:pt idx="3">
-                  <c:v>0.852</c:v>
+                  <c:v>0.81</c:v>
                 </c:pt>
                 <c:pt idx="4">
-                  <c:v>1.207</c:v>
+                  <c:v>1.145</c:v>
                 </c:pt>
               </c:numCache>
             </c:numRef>
@@ -471,31 +471,31 @@
                 <c:formatCode>General</c:formatCode>
                 <c:ptCount val="9"/>
                 <c:pt idx="0">
-                  <c:v>0.144796272192</c:v>
+                  <c:v>0.1445198616576</c:v>
                 </c:pt>
                 <c:pt idx="1">
-                  <c:v>0.136534665312</c:v>
+                  <c:v>0.1362573879264</c:v>
                 </c:pt>
                 <c:pt idx="2">
-                  <c:v>0.121878050976</c:v>
+                  <c:v>0.121637595024</c:v>
                 </c:pt>
                 <c:pt idx="3">
-                  <c:v>0.0922039803072</c:v>
+                  <c:v>0.0920171650176</c:v>
                 </c:pt>
                 <c:pt idx="4">
-                  <c:v>0.072169173504</c:v>
+                  <c:v>0.051255410688</c:v>
                 </c:pt>
                 <c:pt idx="5">
-                  <c:v>0.0468519222816</c:v>
+                  <c:v>0.0467623253952</c:v>
                 </c:pt>
                 <c:pt idx="6">
-                  <c:v>0.039933737856</c:v>
+                  <c:v>0.039857379696</c:v>
                 </c:pt>
                 <c:pt idx="7">
-                  <c:v>0.024350115456</c:v>
+                  <c:v>0.0230393503872</c:v>
                 </c:pt>
                 <c:pt idx="8">
-                  <c:v>0.0212140609632</c:v>
+                  <c:v>0.0030995703648</c:v>
                 </c:pt>
               </c:numCache>
             </c:numRef>
@@ -3911,7 +3911,7 @@
               </a:defRPr>
             </a:pPr>
             <a:r>
-              <a:t>0.70Q</a:t>
+              <a:t>0.66Q</a:t>
             </a:r>
           </a:p>
         </p:txBody>
@@ -5648,7 +5648,7 @@
               </a:defRPr>
             </a:pPr>
             <a:r>
-              <a:t>Base case reaches 0.70Q generated output tokens/day by 2030.</a:t>
+              <a:t>Base case reaches 0.66Q generated output tokens/day by 2030.</a:t>
             </a:r>
           </a:p>
         </p:txBody>
@@ -6510,7 +6510,7 @@
               </a:defRPr>
             </a:pPr>
             <a:r>
-              <a:t>Base 2026-2030 growth: 6.8x</a:t>
+              <a:t>Base 2026-2030 growth: 6.7x</a:t>
             </a:r>
           </a:p>
         </p:txBody>
@@ -10230,7 +10230,7 @@
               </a:defRPr>
             </a:pPr>
             <a:r>
-              <a:t>72,091</a:t>
+              <a:t>76,406</a:t>
             </a:r>
           </a:p>
         </p:txBody>
@@ -10335,7 +10335,7 @@
               </a:defRPr>
             </a:pPr>
             <a:r>
-              <a:t>298</a:t>
+              <a:t>338</a:t>
             </a:r>
           </a:p>
         </p:txBody>
@@ -10440,7 +10440,7 @@
               </a:defRPr>
             </a:pPr>
             <a:r>
-              <a:t>1,048</a:t>
+              <a:t>1,613</a:t>
             </a:r>
           </a:p>
         </p:txBody>

--- a/llm_token_capacity_project/outputs/reports/llm_token_capacity_samsung_style_en_2026_2030.pptx
+++ b/llm_token_capacity_project/outputs/reports/llm_token_capacity_samsung_style_en_2026_2030.pptx
@@ -4492,7 +4492,7 @@
               </a:defRPr>
             </a:pPr>
             <a:r>
-              <a:t>IR, filings, model cards, technical reports, InferenceX benchmark updates</a:t>
+              <a:t>IR, filings, model cards, technical reports, InferenceX, MLPerf, and serving-stack updates</a:t>
             </a:r>
           </a:p>
         </p:txBody>
@@ -5127,7 +5127,7 @@
               </a:defRPr>
             </a:pPr>
             <a:r>
-              <a:t>Workbook: core formula, public benchmark inputs, scenario inputs, calculations, outputs, checks, and an aggressive upside view.</a:t>
+              <a:t>Workbook: core formula, public benchmark inputs, scenario inputs, calculations, outputs, checks, source registry, provenance trace, and an aggressive upside view.</a:t>
             </a:r>
           </a:p>
         </p:txBody>
@@ -10080,7 +10080,7 @@
               </a:defRPr>
             </a:pPr>
             <a:r>
-              <a:t>InferenceX calibrates the serving-efficiency assumptions</a:t>
+              <a:t>InferenceX, MLPerf, and serving-stack docs calibrate the efficiency assumptions</a:t>
             </a:r>
           </a:p>
         </p:txBody>
@@ -10115,7 +10115,7 @@
               </a:defRPr>
             </a:pPr>
             <a:r>
-              <a:t>The benchmark layer narrows the plausible range for tokens/MW, joules/token, latency conditions, and workload shape.</a:t>
+              <a:t>The benchmark layer narrows the plausible range for tokens/MW, joules/token, latency conditions, workload shape, and accelerator replacement.</a:t>
             </a:r>
           </a:p>
         </p:txBody>

--- a/llm_token_capacity_project/outputs/reports/llm_token_capacity_samsung_style_en_2026_2030.pptx
+++ b/llm_token_capacity_project/outputs/reports/llm_token_capacity_samsung_style_en_2026_2030.pptx
@@ -169,19 +169,19 @@
                 <c:formatCode>General</c:formatCode>
                 <c:ptCount val="5"/>
                 <c:pt idx="0">
-                  <c:v>0.051</c:v>
+                  <c:v>0.041</c:v>
                 </c:pt>
                 <c:pt idx="1">
-                  <c:v>0.101</c:v>
+                  <c:v>0.083</c:v>
                 </c:pt>
                 <c:pt idx="2">
-                  <c:v>0.161</c:v>
+                  <c:v>0.132</c:v>
                 </c:pt>
                 <c:pt idx="3">
-                  <c:v>0.23</c:v>
+                  <c:v>0.19</c:v>
                 </c:pt>
                 <c:pt idx="4">
-                  <c:v>0.308</c:v>
+                  <c:v>0.254</c:v>
                 </c:pt>
               </c:numCache>
             </c:numRef>
@@ -232,19 +232,19 @@
                 <c:formatCode>General</c:formatCode>
                 <c:ptCount val="5"/>
                 <c:pt idx="0">
-                  <c:v>0.098</c:v>
+                  <c:v>0.08</c:v>
                 </c:pt>
                 <c:pt idx="1">
-                  <c:v>0.201</c:v>
+                  <c:v>0.164</c:v>
                 </c:pt>
                 <c:pt idx="2">
-                  <c:v>0.328</c:v>
+                  <c:v>0.268</c:v>
                 </c:pt>
                 <c:pt idx="3">
-                  <c:v>0.481</c:v>
+                  <c:v>0.394</c:v>
                 </c:pt>
                 <c:pt idx="4">
-                  <c:v>0.658</c:v>
+                  <c:v>0.541</c:v>
                 </c:pt>
               </c:numCache>
             </c:numRef>
@@ -295,19 +295,19 @@
                 <c:formatCode>General</c:formatCode>
                 <c:ptCount val="5"/>
                 <c:pt idx="0">
-                  <c:v>0.148</c:v>
+                  <c:v>0.12</c:v>
                 </c:pt>
                 <c:pt idx="1">
-                  <c:v>0.316</c:v>
+                  <c:v>0.257</c:v>
                 </c:pt>
                 <c:pt idx="2">
-                  <c:v>0.535</c:v>
+                  <c:v>0.436</c:v>
                 </c:pt>
                 <c:pt idx="3">
-                  <c:v>0.81</c:v>
+                  <c:v>0.663</c:v>
                 </c:pt>
                 <c:pt idx="4">
-                  <c:v>1.145</c:v>
+                  <c:v>0.939</c:v>
                 </c:pt>
               </c:numCache>
             </c:numRef>
@@ -471,31 +471,31 @@
                 <c:formatCode>General</c:formatCode>
                 <c:ptCount val="9"/>
                 <c:pt idx="0">
-                  <c:v>0.1445198616576</c:v>
+                  <c:v>0.117604700928</c:v>
                 </c:pt>
                 <c:pt idx="1">
-                  <c:v>0.1362573879264</c:v>
+                  <c:v>0.1116598239936</c:v>
                 </c:pt>
                 <c:pt idx="2">
-                  <c:v>0.121637595024</c:v>
+                  <c:v>0.0999095920416</c:v>
                 </c:pt>
                 <c:pt idx="3">
-                  <c:v>0.0920171650176</c:v>
+                  <c:v>0.0671012843904</c:v>
                 </c:pt>
                 <c:pt idx="4">
-                  <c:v>0.051255410688</c:v>
+                  <c:v>0.046128282624</c:v>
                 </c:pt>
                 <c:pt idx="5">
-                  <c:v>0.0467623253952</c:v>
+                  <c:v>0.0428970862656</c:v>
                 </c:pt>
                 <c:pt idx="6">
-                  <c:v>0.039857379696</c:v>
+                  <c:v>0.0340065541728</c:v>
                 </c:pt>
                 <c:pt idx="7">
-                  <c:v>0.0230393503872</c:v>
+                  <c:v>0.0194207386752</c:v>
                 </c:pt>
                 <c:pt idx="8">
-                  <c:v>0.0030995703648</c:v>
+                  <c:v>0.0024526805184</c:v>
                 </c:pt>
               </c:numCache>
             </c:numRef>
@@ -3911,7 +3911,7 @@
               </a:defRPr>
             </a:pPr>
             <a:r>
-              <a:t>0.66Q</a:t>
+              <a:t>0.54Q</a:t>
             </a:r>
           </a:p>
         </p:txBody>
@@ -4121,7 +4121,7 @@
               </a:defRPr>
             </a:pPr>
             <a:r>
-              <a:t>2026-05-27</a:t>
+              <a:t>2026-07-20</a:t>
             </a:r>
           </a:p>
         </p:txBody>
@@ -5277,7 +5277,7 @@
               </a:defRPr>
             </a:pPr>
             <a:r>
-              <a:t>2026-05-27</a:t>
+              <a:t>2026-07-20</a:t>
             </a:r>
           </a:p>
         </p:txBody>
@@ -5648,7 +5648,7 @@
               </a:defRPr>
             </a:pPr>
             <a:r>
-              <a:t>Base case reaches 0.66Q generated output tokens/day by 2030.</a:t>
+              <a:t>Base case reaches 0.54Q generated output tokens/day by 2030.</a:t>
             </a:r>
           </a:p>
         </p:txBody>
@@ -6133,7 +6133,7 @@
               </a:defRPr>
             </a:pPr>
             <a:r>
-              <a:t>2026-05-27</a:t>
+              <a:t>2026-07-20</a:t>
             </a:r>
           </a:p>
         </p:txBody>
@@ -6510,7 +6510,7 @@
               </a:defRPr>
             </a:pPr>
             <a:r>
-              <a:t>Base 2026-2030 growth: 6.7x</a:t>
+              <a:t>Base 2026-2030 growth: 6.8x</a:t>
             </a:r>
           </a:p>
         </p:txBody>
@@ -6660,7 +6660,7 @@
               </a:defRPr>
             </a:pPr>
             <a:r>
-              <a:t>2026-05-27</a:t>
+              <a:t>2026-07-20</a:t>
             </a:r>
           </a:p>
         </p:txBody>
@@ -7294,7 +7294,7 @@
               </a:defRPr>
             </a:pPr>
             <a:r>
-              <a:t>2026-05-27</a:t>
+              <a:t>2026-07-20</a:t>
             </a:r>
           </a:p>
         </p:txBody>
@@ -8488,7 +8488,7 @@
               </a:defRPr>
             </a:pPr>
             <a:r>
-              <a:t>2026-05-27</a:t>
+              <a:t>2026-07-20</a:t>
             </a:r>
           </a:p>
         </p:txBody>
@@ -9070,7 +9070,7 @@
               </a:defRPr>
             </a:pPr>
             <a:r>
-              <a:t>2026-05-27</a:t>
+              <a:t>2026-07-20</a:t>
             </a:r>
           </a:p>
         </p:txBody>
@@ -9939,7 +9939,7 @@
               </a:defRPr>
             </a:pPr>
             <a:r>
-              <a:t>2026-05-27</a:t>
+              <a:t>2026-07-20</a:t>
             </a:r>
           </a:p>
         </p:txBody>
@@ -10230,7 +10230,7 @@
               </a:defRPr>
             </a:pPr>
             <a:r>
-              <a:t>76,406</a:t>
+              <a:t>0</a:t>
             </a:r>
           </a:p>
         </p:txBody>
@@ -10335,7 +10335,7 @@
               </a:defRPr>
             </a:pPr>
             <a:r>
-              <a:t>338</a:t>
+              <a:t>0</a:t>
             </a:r>
           </a:p>
         </p:txBody>
@@ -10440,7 +10440,7 @@
               </a:defRPr>
             </a:pPr>
             <a:r>
-              <a:t>1,613</a:t>
+              <a:t>0</a:t>
             </a:r>
           </a:p>
         </p:txBody>
@@ -10713,7 +10713,7 @@
               </a:defRPr>
             </a:pPr>
             <a:r>
-              <a:t>2026-05-27</a:t>
+              <a:t>2026-07-20</a:t>
             </a:r>
           </a:p>
         </p:txBody>
@@ -11466,7 +11466,7 @@
               </a:defRPr>
             </a:pPr>
             <a:r>
-              <a:t>2026-05-27</a:t>
+              <a:t>2026-07-20</a:t>
             </a:r>
           </a:p>
         </p:txBody>

--- a/llm_token_capacity_project/outputs/reports/llm_token_capacity_samsung_style_en_2026_2030.pptx
+++ b/llm_token_capacity_project/outputs/reports/llm_token_capacity_samsung_style_en_2026_2030.pptx
@@ -477,22 +477,22 @@
                   <c:v>0.1116598239936</c:v>
                 </c:pt>
                 <c:pt idx="2">
-                  <c:v>0.0999095920416</c:v>
+                  <c:v>0.0999098800128</c:v>
                 </c:pt>
                 <c:pt idx="3">
                   <c:v>0.0671012843904</c:v>
                 </c:pt>
                 <c:pt idx="4">
-                  <c:v>0.046128282624</c:v>
+                  <c:v>0.046127999232</c:v>
                 </c:pt>
                 <c:pt idx="5">
                   <c:v>0.0428970862656</c:v>
                 </c:pt>
                 <c:pt idx="6">
-                  <c:v>0.0340065541728</c:v>
+                  <c:v>0.0340064488512</c:v>
                 </c:pt>
                 <c:pt idx="7">
-                  <c:v>0.0194207386752</c:v>
+                  <c:v>0.019420587648</c:v>
                 </c:pt>
                 <c:pt idx="8">
                   <c:v>0.0024526805184</c:v>

--- a/llm_token_capacity_project/outputs/reports/llm_token_capacity_samsung_style_en_2026_2030.pptx
+++ b/llm_token_capacity_project/outputs/reports/llm_token_capacity_samsung_style_en_2026_2030.pptx
@@ -169,19 +169,19 @@
                 <c:formatCode>General</c:formatCode>
                 <c:ptCount val="5"/>
                 <c:pt idx="0">
-                  <c:v>0.041</c:v>
+                  <c:v>0.047</c:v>
                 </c:pt>
                 <c:pt idx="1">
-                  <c:v>0.083</c:v>
+                  <c:v>0.094</c:v>
                 </c:pt>
                 <c:pt idx="2">
-                  <c:v>0.132</c:v>
+                  <c:v>0.152</c:v>
                 </c:pt>
                 <c:pt idx="3">
-                  <c:v>0.19</c:v>
+                  <c:v>0.22</c:v>
                 </c:pt>
                 <c:pt idx="4">
-                  <c:v>0.254</c:v>
+                  <c:v>0.296</c:v>
                 </c:pt>
               </c:numCache>
             </c:numRef>
@@ -232,19 +232,19 @@
                 <c:formatCode>General</c:formatCode>
                 <c:ptCount val="5"/>
                 <c:pt idx="0">
-                  <c:v>0.08</c:v>
+                  <c:v>0.085</c:v>
                 </c:pt>
                 <c:pt idx="1">
-                  <c:v>0.164</c:v>
+                  <c:v>0.177</c:v>
                 </c:pt>
                 <c:pt idx="2">
-                  <c:v>0.268</c:v>
+                  <c:v>0.291</c:v>
                 </c:pt>
                 <c:pt idx="3">
-                  <c:v>0.394</c:v>
+                  <c:v>0.43</c:v>
                 </c:pt>
                 <c:pt idx="4">
-                  <c:v>0.541</c:v>
+                  <c:v>0.594</c:v>
                 </c:pt>
               </c:numCache>
             </c:numRef>
@@ -295,19 +295,19 @@
                 <c:formatCode>General</c:formatCode>
                 <c:ptCount val="5"/>
                 <c:pt idx="0">
-                  <c:v>0.12</c:v>
+                  <c:v>0.124</c:v>
                 </c:pt>
                 <c:pt idx="1">
-                  <c:v>0.257</c:v>
+                  <c:v>0.267</c:v>
                 </c:pt>
                 <c:pt idx="2">
-                  <c:v>0.436</c:v>
+                  <c:v>0.456</c:v>
                 </c:pt>
                 <c:pt idx="3">
-                  <c:v>0.663</c:v>
+                  <c:v>0.696</c:v>
                 </c:pt>
                 <c:pt idx="4">
-                  <c:v>0.939</c:v>
+                  <c:v>0.992</c:v>
                 </c:pt>
               </c:numCache>
             </c:numRef>
@@ -435,28 +435,28 @@
               <c:strCache>
                 <c:ptCount val="9"/>
                 <c:pt idx="0">
+                  <c:v>Microsoft</c:v>
+                </c:pt>
+                <c:pt idx="1">
+                  <c:v>Meta</c:v>
+                </c:pt>
+                <c:pt idx="2">
+                  <c:v>Tencent</c:v>
+                </c:pt>
+                <c:pt idx="3">
+                  <c:v>xAI</c:v>
+                </c:pt>
+                <c:pt idx="4">
+                  <c:v>Alibaba</c:v>
+                </c:pt>
+                <c:pt idx="5">
+                  <c:v>Google</c:v>
+                </c:pt>
+                <c:pt idx="6">
                   <c:v>OpenAI</c:v>
                 </c:pt>
-                <c:pt idx="1">
-                  <c:v>Google</c:v>
-                </c:pt>
-                <c:pt idx="2">
-                  <c:v>Microsoft</c:v>
-                </c:pt>
-                <c:pt idx="3">
+                <c:pt idx="7">
                   <c:v>Anthropic</c:v>
-                </c:pt>
-                <c:pt idx="4">
-                  <c:v>Meta</c:v>
-                </c:pt>
-                <c:pt idx="5">
-                  <c:v>Tencent</c:v>
-                </c:pt>
-                <c:pt idx="6">
-                  <c:v>xAI</c:v>
-                </c:pt>
-                <c:pt idx="7">
-                  <c:v>Alibaba</c:v>
                 </c:pt>
                 <c:pt idx="8">
                   <c:v>DeepSeek</c:v>
@@ -471,31 +471,31 @@
                 <c:formatCode>General</c:formatCode>
                 <c:ptCount val="9"/>
                 <c:pt idx="0">
-                  <c:v>0.117604700928</c:v>
+                  <c:v>0.2154517006752</c:v>
                 </c:pt>
                 <c:pt idx="1">
-                  <c:v>0.1116598239936</c:v>
+                  <c:v>0.111140957952</c:v>
                 </c:pt>
                 <c:pt idx="2">
-                  <c:v>0.0999098800128</c:v>
+                  <c:v>0.0943886774016</c:v>
                 </c:pt>
                 <c:pt idx="3">
-                  <c:v>0.0671012843904</c:v>
+                  <c:v>0.0718923135168</c:v>
                 </c:pt>
                 <c:pt idx="4">
-                  <c:v>0.046127999232</c:v>
+                  <c:v>0.0468196402176</c:v>
                 </c:pt>
                 <c:pt idx="5">
-                  <c:v>0.0428970862656</c:v>
+                  <c:v>0.0196766000928</c:v>
                 </c:pt>
                 <c:pt idx="6">
-                  <c:v>0.0340064488512</c:v>
+                  <c:v>0.0185825173248</c:v>
                 </c:pt>
                 <c:pt idx="7">
-                  <c:v>0.019420587648</c:v>
+                  <c:v>0.0122926510656</c:v>
                 </c:pt>
                 <c:pt idx="8">
-                  <c:v>0.0024526805184</c:v>
+                  <c:v>0.0040192552512</c:v>
                 </c:pt>
               </c:numCache>
             </c:numRef>
@@ -3911,7 +3911,7 @@
               </a:defRPr>
             </a:pPr>
             <a:r>
-              <a:t>0.54Q</a:t>
+              <a:t>0.59Q</a:t>
             </a:r>
           </a:p>
         </p:txBody>
@@ -4121,7 +4121,7 @@
               </a:defRPr>
             </a:pPr>
             <a:r>
-              <a:t>2026-07-20</a:t>
+              <a:t>2026-07-22</a:t>
             </a:r>
           </a:p>
         </p:txBody>
@@ -5277,7 +5277,7 @@
               </a:defRPr>
             </a:pPr>
             <a:r>
-              <a:t>2026-07-20</a:t>
+              <a:t>2026-07-22</a:t>
             </a:r>
           </a:p>
         </p:txBody>
@@ -5648,7 +5648,7 @@
               </a:defRPr>
             </a:pPr>
             <a:r>
-              <a:t>Base case reaches 0.54Q generated output tokens/day by 2030.</a:t>
+              <a:t>Base case reaches 0.59Q generated output tokens/day by 2030.</a:t>
             </a:r>
           </a:p>
         </p:txBody>
@@ -5798,7 +5798,7 @@
               </a:defRPr>
             </a:pPr>
             <a:r>
-              <a:t>The largest 2030 contributors are OpenAI, Google, Microsoft.</a:t>
+              <a:t>The largest 2030 contributors are Microsoft, Meta, Tencent.</a:t>
             </a:r>
           </a:p>
         </p:txBody>
@@ -6133,7 +6133,7 @@
               </a:defRPr>
             </a:pPr>
             <a:r>
-              <a:t>2026-07-20</a:t>
+              <a:t>2026-07-22</a:t>
             </a:r>
           </a:p>
         </p:txBody>
@@ -6510,7 +6510,7 @@
               </a:defRPr>
             </a:pPr>
             <a:r>
-              <a:t>Base 2026-2030 growth: 6.8x</a:t>
+              <a:t>Base 2026-2030 growth: 7.0x</a:t>
             </a:r>
           </a:p>
         </p:txBody>
@@ -6660,7 +6660,7 @@
               </a:defRPr>
             </a:pPr>
             <a:r>
-              <a:t>2026-07-20</a:t>
+              <a:t>2026-07-22</a:t>
             </a:r>
           </a:p>
         </p:txBody>
@@ -6969,7 +6969,7 @@
               </a:defRPr>
             </a:pPr>
             <a:r>
-              <a:t>OpenAI</a:t>
+              <a:t>Microsoft</a:t>
             </a:r>
           </a:p>
         </p:txBody>
@@ -7294,7 +7294,7 @@
               </a:defRPr>
             </a:pPr>
             <a:r>
-              <a:t>2026-07-20</a:t>
+              <a:t>2026-07-22</a:t>
             </a:r>
           </a:p>
         </p:txBody>
@@ -8488,7 +8488,7 @@
               </a:defRPr>
             </a:pPr>
             <a:r>
-              <a:t>2026-07-20</a:t>
+              <a:t>2026-07-22</a:t>
             </a:r>
           </a:p>
         </p:txBody>
@@ -9070,7 +9070,7 @@
               </a:defRPr>
             </a:pPr>
             <a:r>
-              <a:t>2026-07-20</a:t>
+              <a:t>2026-07-22</a:t>
             </a:r>
           </a:p>
         </p:txBody>
@@ -9939,7 +9939,7 @@
               </a:defRPr>
             </a:pPr>
             <a:r>
-              <a:t>2026-07-20</a:t>
+              <a:t>2026-07-22</a:t>
             </a:r>
           </a:p>
         </p:txBody>
@@ -10713,7 +10713,7 @@
               </a:defRPr>
             </a:pPr>
             <a:r>
-              <a:t>2026-07-20</a:t>
+              <a:t>2026-07-22</a:t>
             </a:r>
           </a:p>
         </p:txBody>
@@ -11466,7 +11466,7 @@
               </a:defRPr>
             </a:pPr>
             <a:r>
-              <a:t>2026-07-20</a:t>
+              <a:t>2026-07-22</a:t>
             </a:r>
           </a:p>
         </p:txBody>

--- a/llm_token_capacity_project/outputs/reports/llm_token_capacity_samsung_style_en_2026_2030.pptx
+++ b/llm_token_capacity_project/outputs/reports/llm_token_capacity_samsung_style_en_2026_2030.pptx
@@ -169,19 +169,19 @@
                 <c:formatCode>General</c:formatCode>
                 <c:ptCount val="5"/>
                 <c:pt idx="0">
-                  <c:v>0.047</c:v>
+                  <c:v>0.046</c:v>
                 </c:pt>
                 <c:pt idx="1">
-                  <c:v>0.094</c:v>
+                  <c:v>0.092</c:v>
                 </c:pt>
                 <c:pt idx="2">
-                  <c:v>0.152</c:v>
+                  <c:v>0.149</c:v>
                 </c:pt>
                 <c:pt idx="3">
-                  <c:v>0.22</c:v>
+                  <c:v>0.216</c:v>
                 </c:pt>
                 <c:pt idx="4">
-                  <c:v>0.296</c:v>
+                  <c:v>0.291</c:v>
                 </c:pt>
               </c:numCache>
             </c:numRef>
@@ -232,19 +232,19 @@
                 <c:formatCode>General</c:formatCode>
                 <c:ptCount val="5"/>
                 <c:pt idx="0">
-                  <c:v>0.085</c:v>
+                  <c:v>0.083</c:v>
                 </c:pt>
                 <c:pt idx="1">
-                  <c:v>0.177</c:v>
+                  <c:v>0.172</c:v>
                 </c:pt>
                 <c:pt idx="2">
-                  <c:v>0.291</c:v>
+                  <c:v>0.285</c:v>
                 </c:pt>
                 <c:pt idx="3">
-                  <c:v>0.43</c:v>
+                  <c:v>0.421</c:v>
                 </c:pt>
                 <c:pt idx="4">
-                  <c:v>0.594</c:v>
+                  <c:v>0.583</c:v>
                 </c:pt>
               </c:numCache>
             </c:numRef>
@@ -295,19 +295,19 @@
                 <c:formatCode>General</c:formatCode>
                 <c:ptCount val="5"/>
                 <c:pt idx="0">
-                  <c:v>0.124</c:v>
+                  <c:v>0.12</c:v>
                 </c:pt>
                 <c:pt idx="1">
-                  <c:v>0.267</c:v>
+                  <c:v>0.259</c:v>
                 </c:pt>
                 <c:pt idx="2">
-                  <c:v>0.456</c:v>
+                  <c:v>0.444</c:v>
                 </c:pt>
                 <c:pt idx="3">
-                  <c:v>0.696</c:v>
+                  <c:v>0.68</c:v>
                 </c:pt>
                 <c:pt idx="4">
-                  <c:v>0.992</c:v>
+                  <c:v>0.971</c:v>
                 </c:pt>
               </c:numCache>
             </c:numRef>
@@ -450,10 +450,10 @@
                   <c:v>Alibaba</c:v>
                 </c:pt>
                 <c:pt idx="5">
-                  <c:v>Google</c:v>
+                  <c:v>OpenAI</c:v>
                 </c:pt>
                 <c:pt idx="6">
-                  <c:v>OpenAI</c:v>
+                  <c:v>Google</c:v>
                 </c:pt>
                 <c:pt idx="7">
                   <c:v>Anthropic</c:v>
@@ -486,13 +486,13 @@
                   <c:v>0.0468196402176</c:v>
                 </c:pt>
                 <c:pt idx="5">
-                  <c:v>0.0196766000928</c:v>
+                  <c:v>0.0154789899264</c:v>
                 </c:pt>
                 <c:pt idx="6">
-                  <c:v>0.0185825173248</c:v>
+                  <c:v>0.014575200912</c:v>
                 </c:pt>
                 <c:pt idx="7">
-                  <c:v>0.0122926510656</c:v>
+                  <c:v>0.0088364400768</c:v>
                 </c:pt>
                 <c:pt idx="8">
                   <c:v>0.0040192552512</c:v>
@@ -3911,7 +3911,7 @@
               </a:defRPr>
             </a:pPr>
             <a:r>
-              <a:t>0.59Q</a:t>
+              <a:t>0.58Q</a:t>
             </a:r>
           </a:p>
         </p:txBody>
@@ -5648,7 +5648,7 @@
               </a:defRPr>
             </a:pPr>
             <a:r>
-              <a:t>Base case reaches 0.59Q generated output tokens/day by 2030.</a:t>
+              <a:t>Base case reaches 0.58Q generated output tokens/day by 2030.</a:t>
             </a:r>
           </a:p>
         </p:txBody>

--- a/llm_token_capacity_project/outputs/reports/llm_token_capacity_samsung_style_en_2026_2030.pptx
+++ b/llm_token_capacity_project/outputs/reports/llm_token_capacity_samsung_style_en_2026_2030.pptx
@@ -178,7 +178,7 @@
                   <c:v>0.149</c:v>
                 </c:pt>
                 <c:pt idx="3">
-                  <c:v>0.216</c:v>
+                  <c:v>0.215</c:v>
                 </c:pt>
                 <c:pt idx="4">
                   <c:v>0.291</c:v>
@@ -244,7 +244,7 @@
                   <c:v>0.421</c:v>
                 </c:pt>
                 <c:pt idx="4">
-                  <c:v>0.583</c:v>
+                  <c:v>0.582</c:v>
                 </c:pt>
               </c:numCache>
             </c:numRef>
@@ -298,10 +298,10 @@
                   <c:v>0.12</c:v>
                 </c:pt>
                 <c:pt idx="1">
-                  <c:v>0.259</c:v>
+                  <c:v>0.26</c:v>
                 </c:pt>
                 <c:pt idx="2">
-                  <c:v>0.444</c:v>
+                  <c:v>0.445</c:v>
                 </c:pt>
                 <c:pt idx="3">
                   <c:v>0.68</c:v>
@@ -486,13 +486,13 @@
                   <c:v>0.0468196402176</c:v>
                 </c:pt>
                 <c:pt idx="5">
-                  <c:v>0.0154789899264</c:v>
+                  <c:v>0.015656262336</c:v>
                 </c:pt>
                 <c:pt idx="6">
-                  <c:v>0.014575200912</c:v>
+                  <c:v>0.0142748959392</c:v>
                 </c:pt>
                 <c:pt idx="7">
-                  <c:v>0.0088364400768</c:v>
+                  <c:v>0.00854635104</c:v>
                 </c:pt>
                 <c:pt idx="8">
                   <c:v>0.0040192552512</c:v>

--- a/llm_token_capacity_project/outputs/reports/llm_token_capacity_samsung_style_en_2026_2030.pptx
+++ b/llm_token_capacity_project/outputs/reports/llm_token_capacity_samsung_style_en_2026_2030.pptx
@@ -169,19 +169,19 @@
                 <c:formatCode>General</c:formatCode>
                 <c:ptCount val="5"/>
                 <c:pt idx="0">
-                  <c:v>0.046</c:v>
+                  <c:v>0.043</c:v>
                 </c:pt>
                 <c:pt idx="1">
-                  <c:v>0.092</c:v>
+                  <c:v>0.086</c:v>
                 </c:pt>
                 <c:pt idx="2">
-                  <c:v>0.149</c:v>
+                  <c:v>0.139</c:v>
                 </c:pt>
                 <c:pt idx="3">
-                  <c:v>0.215</c:v>
+                  <c:v>0.2</c:v>
                 </c:pt>
                 <c:pt idx="4">
-                  <c:v>0.291</c:v>
+                  <c:v>0.271</c:v>
                 </c:pt>
               </c:numCache>
             </c:numRef>
@@ -232,19 +232,19 @@
                 <c:formatCode>General</c:formatCode>
                 <c:ptCount val="5"/>
                 <c:pt idx="0">
-                  <c:v>0.083</c:v>
+                  <c:v>0.077</c:v>
                 </c:pt>
                 <c:pt idx="1">
-                  <c:v>0.172</c:v>
+                  <c:v>0.16</c:v>
                 </c:pt>
                 <c:pt idx="2">
-                  <c:v>0.285</c:v>
+                  <c:v>0.264</c:v>
                 </c:pt>
                 <c:pt idx="3">
-                  <c:v>0.421</c:v>
+                  <c:v>0.391</c:v>
                 </c:pt>
                 <c:pt idx="4">
-                  <c:v>0.582</c:v>
+                  <c:v>0.54</c:v>
                 </c:pt>
               </c:numCache>
             </c:numRef>
@@ -295,19 +295,19 @@
                 <c:formatCode>General</c:formatCode>
                 <c:ptCount val="5"/>
                 <c:pt idx="0">
-                  <c:v>0.12</c:v>
+                  <c:v>0.111</c:v>
                 </c:pt>
                 <c:pt idx="1">
-                  <c:v>0.26</c:v>
+                  <c:v>0.24</c:v>
                 </c:pt>
                 <c:pt idx="2">
-                  <c:v>0.445</c:v>
+                  <c:v>0.411</c:v>
                 </c:pt>
                 <c:pt idx="3">
-                  <c:v>0.68</c:v>
+                  <c:v>0.629</c:v>
                 </c:pt>
                 <c:pt idx="4">
-                  <c:v>0.971</c:v>
+                  <c:v>0.898</c:v>
                 </c:pt>
               </c:numCache>
             </c:numRef>
@@ -471,31 +471,31 @@
                 <c:formatCode>General</c:formatCode>
                 <c:ptCount val="9"/>
                 <c:pt idx="0">
-                  <c:v>0.2154517006752</c:v>
+                  <c:v>0.1934722988352</c:v>
                 </c:pt>
                 <c:pt idx="1">
-                  <c:v>0.111140957952</c:v>
+                  <c:v>0.108158823936</c:v>
                 </c:pt>
                 <c:pt idx="2">
-                  <c:v>0.0943886774016</c:v>
+                  <c:v>0.091018996272</c:v>
                 </c:pt>
                 <c:pt idx="3">
-                  <c:v>0.0718923135168</c:v>
+                  <c:v>0.0661481787744</c:v>
                 </c:pt>
                 <c:pt idx="4">
-                  <c:v>0.0468196402176</c:v>
+                  <c:v>0.0437791606272</c:v>
                 </c:pt>
                 <c:pt idx="5">
-                  <c:v>0.015656262336</c:v>
+                  <c:v>0.0135126104256</c:v>
                 </c:pt>
                 <c:pt idx="6">
-                  <c:v>0.0142748959392</c:v>
+                  <c:v>0.0130566419424</c:v>
                 </c:pt>
                 <c:pt idx="7">
-                  <c:v>0.00854635104</c:v>
+                  <c:v>0.0068914084608</c:v>
                 </c:pt>
                 <c:pt idx="8">
-                  <c:v>0.0040192552512</c:v>
+                  <c:v>0.0036246867552</c:v>
                 </c:pt>
               </c:numCache>
             </c:numRef>
@@ -3911,7 +3911,7 @@
               </a:defRPr>
             </a:pPr>
             <a:r>
-              <a:t>0.58Q</a:t>
+              <a:t>0.54Q</a:t>
             </a:r>
           </a:p>
         </p:txBody>
@@ -4121,7 +4121,7 @@
               </a:defRPr>
             </a:pPr>
             <a:r>
-              <a:t>2026-07-22</a:t>
+              <a:t>2026-07-23</a:t>
             </a:r>
           </a:p>
         </p:txBody>
@@ -5277,7 +5277,7 @@
               </a:defRPr>
             </a:pPr>
             <a:r>
-              <a:t>2026-07-22</a:t>
+              <a:t>2026-07-23</a:t>
             </a:r>
           </a:p>
         </p:txBody>
@@ -5648,7 +5648,7 @@
               </a:defRPr>
             </a:pPr>
             <a:r>
-              <a:t>Base case reaches 0.58Q generated output tokens/day by 2030.</a:t>
+              <a:t>Base case reaches 0.54Q generated output tokens/day by 2030.</a:t>
             </a:r>
           </a:p>
         </p:txBody>
@@ -6133,7 +6133,7 @@
               </a:defRPr>
             </a:pPr>
             <a:r>
-              <a:t>2026-07-22</a:t>
+              <a:t>2026-07-23</a:t>
             </a:r>
           </a:p>
         </p:txBody>
@@ -6660,7 +6660,7 @@
               </a:defRPr>
             </a:pPr>
             <a:r>
-              <a:t>2026-07-22</a:t>
+              <a:t>2026-07-23</a:t>
             </a:r>
           </a:p>
         </p:txBody>
@@ -7294,7 +7294,7 @@
               </a:defRPr>
             </a:pPr>
             <a:r>
-              <a:t>2026-07-22</a:t>
+              <a:t>2026-07-23</a:t>
             </a:r>
           </a:p>
         </p:txBody>
@@ -8488,7 +8488,7 @@
               </a:defRPr>
             </a:pPr>
             <a:r>
-              <a:t>2026-07-22</a:t>
+              <a:t>2026-07-23</a:t>
             </a:r>
           </a:p>
         </p:txBody>
@@ -9070,7 +9070,7 @@
               </a:defRPr>
             </a:pPr>
             <a:r>
-              <a:t>2026-07-22</a:t>
+              <a:t>2026-07-23</a:t>
             </a:r>
           </a:p>
         </p:txBody>
@@ -9939,7 +9939,7 @@
               </a:defRPr>
             </a:pPr>
             <a:r>
-              <a:t>2026-07-22</a:t>
+              <a:t>2026-07-23</a:t>
             </a:r>
           </a:p>
         </p:txBody>
@@ -10713,7 +10713,7 @@
               </a:defRPr>
             </a:pPr>
             <a:r>
-              <a:t>2026-07-22</a:t>
+              <a:t>2026-07-23</a:t>
             </a:r>
           </a:p>
         </p:txBody>
@@ -11466,7 +11466,7 @@
               </a:defRPr>
             </a:pPr>
             <a:r>
-              <a:t>2026-07-22</a:t>
+              <a:t>2026-07-23</a:t>
             </a:r>
           </a:p>
         </p:txBody>

--- a/llm_token_capacity_project/outputs/reports/llm_token_capacity_samsung_style_en_2026_2030.pptx
+++ b/llm_token_capacity_project/outputs/reports/llm_token_capacity_samsung_style_en_2026_2030.pptx
@@ -169,19 +169,19 @@
                 <c:formatCode>General</c:formatCode>
                 <c:ptCount val="5"/>
                 <c:pt idx="0">
-                  <c:v>0.043</c:v>
+                  <c:v>0.105</c:v>
                 </c:pt>
                 <c:pt idx="1">
-                  <c:v>0.086</c:v>
+                  <c:v>0.213</c:v>
                 </c:pt>
                 <c:pt idx="2">
-                  <c:v>0.139</c:v>
+                  <c:v>0.341</c:v>
                 </c:pt>
                 <c:pt idx="3">
-                  <c:v>0.2</c:v>
+                  <c:v>0.488</c:v>
                 </c:pt>
                 <c:pt idx="4">
-                  <c:v>0.271</c:v>
+                  <c:v>0.653</c:v>
                 </c:pt>
               </c:numCache>
             </c:numRef>
@@ -232,19 +232,19 @@
                 <c:formatCode>General</c:formatCode>
                 <c:ptCount val="5"/>
                 <c:pt idx="0">
-                  <c:v>0.077</c:v>
+                  <c:v>0.195</c:v>
                 </c:pt>
                 <c:pt idx="1">
-                  <c:v>0.16</c:v>
+                  <c:v>0.403</c:v>
                 </c:pt>
                 <c:pt idx="2">
-                  <c:v>0.264</c:v>
+                  <c:v>0.659</c:v>
                 </c:pt>
                 <c:pt idx="3">
-                  <c:v>0.391</c:v>
+                  <c:v>0.963</c:v>
                 </c:pt>
                 <c:pt idx="4">
-                  <c:v>0.54</c:v>
+                  <c:v>1.315</c:v>
                 </c:pt>
               </c:numCache>
             </c:numRef>
@@ -295,19 +295,19 @@
                 <c:formatCode>General</c:formatCode>
                 <c:ptCount val="5"/>
                 <c:pt idx="0">
-                  <c:v>0.111</c:v>
+                  <c:v>0.286</c:v>
                 </c:pt>
                 <c:pt idx="1">
-                  <c:v>0.24</c:v>
+                  <c:v>0.615</c:v>
                 </c:pt>
                 <c:pt idx="2">
-                  <c:v>0.411</c:v>
+                  <c:v>1.038</c:v>
                 </c:pt>
                 <c:pt idx="3">
-                  <c:v>0.629</c:v>
+                  <c:v>1.566</c:v>
                 </c:pt>
                 <c:pt idx="4">
-                  <c:v>0.898</c:v>
+                  <c:v>2.203</c:v>
                 </c:pt>
               </c:numCache>
             </c:numRef>
@@ -471,31 +471,31 @@
                 <c:formatCode>General</c:formatCode>
                 <c:ptCount val="9"/>
                 <c:pt idx="0">
-                  <c:v>0.1934722988352</c:v>
+                  <c:v>0.4831356176064</c:v>
                 </c:pt>
                 <c:pt idx="1">
-                  <c:v>0.108158823936</c:v>
+                  <c:v>0.237028502016</c:v>
                 </c:pt>
                 <c:pt idx="2">
-                  <c:v>0.091018996272</c:v>
+                  <c:v>0.2305701679392</c:v>
                 </c:pt>
                 <c:pt idx="3">
-                  <c:v>0.0661481787744</c:v>
+                  <c:v>0.1638686135808</c:v>
                 </c:pt>
                 <c:pt idx="4">
-                  <c:v>0.0437791606272</c:v>
+                  <c:v>0.086238041472</c:v>
                 </c:pt>
                 <c:pt idx="5">
-                  <c:v>0.0135126104256</c:v>
+                  <c:v>0.0517341382272</c:v>
                 </c:pt>
                 <c:pt idx="6">
-                  <c:v>0.0130566419424</c:v>
+                  <c:v>0.0342435993984</c:v>
                 </c:pt>
                 <c:pt idx="7">
-                  <c:v>0.0068914084608</c:v>
+                  <c:v>0.0190656662976</c:v>
                 </c:pt>
                 <c:pt idx="8">
-                  <c:v>0.0036246867552</c:v>
+                  <c:v>0.0088044739776</c:v>
                 </c:pt>
               </c:numCache>
             </c:numRef>
@@ -3911,7 +3911,7 @@
               </a:defRPr>
             </a:pPr>
             <a:r>
-              <a:t>0.54Q</a:t>
+              <a:t>1.31Q</a:t>
             </a:r>
           </a:p>
         </p:txBody>
@@ -5648,7 +5648,7 @@
               </a:defRPr>
             </a:pPr>
             <a:r>
-              <a:t>Base case reaches 0.54Q generated output tokens/day by 2030.</a:t>
+              <a:t>Base case reaches 1.31Q generated output tokens/day by 2030.</a:t>
             </a:r>
           </a:p>
         </p:txBody>
@@ -6510,7 +6510,7 @@
               </a:defRPr>
             </a:pPr>
             <a:r>
-              <a:t>Base 2026-2030 growth: 7.0x</a:t>
+              <a:t>Base 2026-2030 growth: 6.8x</a:t>
             </a:r>
           </a:p>
         </p:txBody>

--- a/llm_token_capacity_project/outputs/reports/llm_token_capacity_samsung_style_en_2026_2030.pptx
+++ b/llm_token_capacity_project/outputs/reports/llm_token_capacity_samsung_style_en_2026_2030.pptx
@@ -169,19 +169,19 @@
                 <c:formatCode>General</c:formatCode>
                 <c:ptCount val="5"/>
                 <c:pt idx="0">
-                  <c:v>0.105</c:v>
+                  <c:v>0.114</c:v>
                 </c:pt>
                 <c:pt idx="1">
-                  <c:v>0.213</c:v>
+                  <c:v>0.221</c:v>
                 </c:pt>
                 <c:pt idx="2">
-                  <c:v>0.341</c:v>
+                  <c:v>0.346</c:v>
                 </c:pt>
                 <c:pt idx="3">
-                  <c:v>0.488</c:v>
+                  <c:v>0.479</c:v>
                 </c:pt>
                 <c:pt idx="4">
-                  <c:v>0.653</c:v>
+                  <c:v>0.626</c:v>
                 </c:pt>
               </c:numCache>
             </c:numRef>
@@ -232,19 +232,19 @@
                 <c:formatCode>General</c:formatCode>
                 <c:ptCount val="5"/>
                 <c:pt idx="0">
-                  <c:v>0.195</c:v>
+                  <c:v>0.21</c:v>
                 </c:pt>
                 <c:pt idx="1">
-                  <c:v>0.403</c:v>
+                  <c:v>0.418</c:v>
                 </c:pt>
                 <c:pt idx="2">
-                  <c:v>0.659</c:v>
+                  <c:v>0.671</c:v>
                 </c:pt>
                 <c:pt idx="3">
-                  <c:v>0.963</c:v>
+                  <c:v>0.951</c:v>
                 </c:pt>
                 <c:pt idx="4">
-                  <c:v>1.315</c:v>
+                  <c:v>1.268</c:v>
                 </c:pt>
               </c:numCache>
             </c:numRef>
@@ -295,19 +295,19 @@
                 <c:formatCode>General</c:formatCode>
                 <c:ptCount val="5"/>
                 <c:pt idx="0">
-                  <c:v>0.286</c:v>
+                  <c:v>0.309</c:v>
                 </c:pt>
                 <c:pt idx="1">
-                  <c:v>0.615</c:v>
+                  <c:v>0.639</c:v>
                 </c:pt>
                 <c:pt idx="2">
-                  <c:v>1.038</c:v>
+                  <c:v>1.062</c:v>
                 </c:pt>
                 <c:pt idx="3">
-                  <c:v>1.566</c:v>
+                  <c:v>1.555</c:v>
                 </c:pt>
                 <c:pt idx="4">
-                  <c:v>2.203</c:v>
+                  <c:v>2.14</c:v>
                 </c:pt>
               </c:numCache>
             </c:numRef>
@@ -447,16 +447,16 @@
                   <c:v>xAI</c:v>
                 </c:pt>
                 <c:pt idx="4">
-                  <c:v>Alibaba</c:v>
+                  <c:v>OpenAI</c:v>
                 </c:pt>
                 <c:pt idx="5">
-                  <c:v>OpenAI</c:v>
+                  <c:v>Google</c:v>
                 </c:pt>
                 <c:pt idx="6">
-                  <c:v>Google</c:v>
+                  <c:v>Anthropic</c:v>
                 </c:pt>
                 <c:pt idx="7">
-                  <c:v>Anthropic</c:v>
+                  <c:v>Alibaba</c:v>
                 </c:pt>
                 <c:pt idx="8">
                   <c:v>DeepSeek</c:v>
@@ -471,28 +471,28 @@
                 <c:formatCode>General</c:formatCode>
                 <c:ptCount val="9"/>
                 <c:pt idx="0">
-                  <c:v>0.4831356176064</c:v>
+                  <c:v>0.4936059624672</c:v>
                 </c:pt>
                 <c:pt idx="1">
-                  <c:v>0.237028502016</c:v>
+                  <c:v>0.240019987968</c:v>
                 </c:pt>
                 <c:pt idx="2">
                   <c:v>0.2305701679392</c:v>
                 </c:pt>
                 <c:pt idx="3">
-                  <c:v>0.1638686135808</c:v>
+                  <c:v>0.1743765496128</c:v>
                 </c:pt>
                 <c:pt idx="4">
-                  <c:v>0.086238041472</c:v>
+                  <c:v>0.0414590596992</c:v>
                 </c:pt>
                 <c:pt idx="5">
-                  <c:v>0.0517341382272</c:v>
+                  <c:v>0.0323625925152</c:v>
                 </c:pt>
                 <c:pt idx="6">
-                  <c:v>0.0342435993984</c:v>
+                  <c:v>0.02410147872</c:v>
                 </c:pt>
                 <c:pt idx="7">
-                  <c:v>0.0190656662976</c:v>
+                  <c:v>0.0226438101504</c:v>
                 </c:pt>
                 <c:pt idx="8">
                   <c:v>0.0088044739776</c:v>
@@ -3911,7 +3911,7 @@
               </a:defRPr>
             </a:pPr>
             <a:r>
-              <a:t>1.31Q</a:t>
+              <a:t>1.27Q</a:t>
             </a:r>
           </a:p>
         </p:txBody>
@@ -4121,7 +4121,7 @@
               </a:defRPr>
             </a:pPr>
             <a:r>
-              <a:t>2026-07-23</a:t>
+              <a:t>2026-07-30</a:t>
             </a:r>
           </a:p>
         </p:txBody>
@@ -5277,7 +5277,7 @@
               </a:defRPr>
             </a:pPr>
             <a:r>
-              <a:t>2026-07-23</a:t>
+              <a:t>2026-07-30</a:t>
             </a:r>
           </a:p>
         </p:txBody>
@@ -5648,7 +5648,7 @@
               </a:defRPr>
             </a:pPr>
             <a:r>
-              <a:t>Base case reaches 1.31Q generated output tokens/day by 2030.</a:t>
+              <a:t>Base case reaches 1.27Q generated output tokens/day by 2030.</a:t>
             </a:r>
           </a:p>
         </p:txBody>
@@ -6133,7 +6133,7 @@
               </a:defRPr>
             </a:pPr>
             <a:r>
-              <a:t>2026-07-23</a:t>
+              <a:t>2026-07-30</a:t>
             </a:r>
           </a:p>
         </p:txBody>
@@ -6510,7 +6510,7 @@
               </a:defRPr>
             </a:pPr>
             <a:r>
-              <a:t>Base 2026-2030 growth: 6.8x</a:t>
+              <a:t>Base 2026-2030 growth: 6.0x</a:t>
             </a:r>
           </a:p>
         </p:txBody>
@@ -6660,7 +6660,7 @@
               </a:defRPr>
             </a:pPr>
             <a:r>
-              <a:t>2026-07-23</a:t>
+              <a:t>2026-07-30</a:t>
             </a:r>
           </a:p>
         </p:txBody>
@@ -7294,7 +7294,7 @@
               </a:defRPr>
             </a:pPr>
             <a:r>
-              <a:t>2026-07-23</a:t>
+              <a:t>2026-07-30</a:t>
             </a:r>
           </a:p>
         </p:txBody>
@@ -8488,7 +8488,7 @@
               </a:defRPr>
             </a:pPr>
             <a:r>
-              <a:t>2026-07-23</a:t>
+              <a:t>2026-07-30</a:t>
             </a:r>
           </a:p>
         </p:txBody>
@@ -9070,7 +9070,7 @@
               </a:defRPr>
             </a:pPr>
             <a:r>
-              <a:t>2026-07-23</a:t>
+              <a:t>2026-07-30</a:t>
             </a:r>
           </a:p>
         </p:txBody>
@@ -9939,7 +9939,7 @@
               </a:defRPr>
             </a:pPr>
             <a:r>
-              <a:t>2026-07-23</a:t>
+              <a:t>2026-07-30</a:t>
             </a:r>
           </a:p>
         </p:txBody>
@@ -10713,7 +10713,7 @@
               </a:defRPr>
             </a:pPr>
             <a:r>
-              <a:t>2026-07-23</a:t>
+              <a:t>2026-07-30</a:t>
             </a:r>
           </a:p>
         </p:txBody>
@@ -11466,7 +11466,7 @@
               </a:defRPr>
             </a:pPr>
             <a:r>
-              <a:t>2026-07-23</a:t>
+              <a:t>2026-07-30</a:t>
             </a:r>
           </a:p>
         </p:txBody>

--- a/llm_token_capacity_project/outputs/reports/llm_token_capacity_samsung_style_en_2026_2030.pptx
+++ b/llm_token_capacity_project/outputs/reports/llm_token_capacity_samsung_style_en_2026_2030.pptx
@@ -169,19 +169,19 @@
                 <c:formatCode>General</c:formatCode>
                 <c:ptCount val="5"/>
                 <c:pt idx="0">
-                  <c:v>0.114</c:v>
+                  <c:v>0.109</c:v>
                 </c:pt>
                 <c:pt idx="1">
-                  <c:v>0.221</c:v>
+                  <c:v>0.21</c:v>
                 </c:pt>
                 <c:pt idx="2">
-                  <c:v>0.346</c:v>
+                  <c:v>0.33</c:v>
                 </c:pt>
                 <c:pt idx="3">
-                  <c:v>0.479</c:v>
+                  <c:v>0.46</c:v>
                 </c:pt>
                 <c:pt idx="4">
-                  <c:v>0.626</c:v>
+                  <c:v>0.603</c:v>
                 </c:pt>
               </c:numCache>
             </c:numRef>
@@ -232,19 +232,19 @@
                 <c:formatCode>General</c:formatCode>
                 <c:ptCount val="5"/>
                 <c:pt idx="0">
-                  <c:v>0.21</c:v>
+                  <c:v>0.2</c:v>
                 </c:pt>
                 <c:pt idx="1">
-                  <c:v>0.418</c:v>
+                  <c:v>0.397</c:v>
                 </c:pt>
                 <c:pt idx="2">
-                  <c:v>0.671</c:v>
+                  <c:v>0.638</c:v>
                 </c:pt>
                 <c:pt idx="3">
-                  <c:v>0.951</c:v>
+                  <c:v>0.909</c:v>
                 </c:pt>
                 <c:pt idx="4">
-                  <c:v>1.268</c:v>
+                  <c:v>1.219</c:v>
                 </c:pt>
               </c:numCache>
             </c:numRef>
@@ -295,19 +295,19 @@
                 <c:formatCode>General</c:formatCode>
                 <c:ptCount val="5"/>
                 <c:pt idx="0">
-                  <c:v>0.309</c:v>
+                  <c:v>0.294</c:v>
                 </c:pt>
                 <c:pt idx="1">
-                  <c:v>0.639</c:v>
+                  <c:v>0.606</c:v>
                 </c:pt>
                 <c:pt idx="2">
-                  <c:v>1.062</c:v>
+                  <c:v>1.007</c:v>
                 </c:pt>
                 <c:pt idx="3">
-                  <c:v>1.555</c:v>
+                  <c:v>1.484</c:v>
                 </c:pt>
                 <c:pt idx="4">
-                  <c:v>2.14</c:v>
+                  <c:v>2.054</c:v>
                 </c:pt>
               </c:numCache>
             </c:numRef>
@@ -471,25 +471,25 @@
                 <c:formatCode>General</c:formatCode>
                 <c:ptCount val="9"/>
                 <c:pt idx="0">
-                  <c:v>0.4936059624672</c:v>
+                  <c:v>0.483970158144</c:v>
                 </c:pt>
                 <c:pt idx="1">
-                  <c:v>0.240019987968</c:v>
+                  <c:v>0.2359450944</c:v>
                 </c:pt>
                 <c:pt idx="2">
                   <c:v>0.2305701679392</c:v>
                 </c:pt>
                 <c:pt idx="3">
-                  <c:v>0.1743765496128</c:v>
+                  <c:v>0.1434707686656</c:v>
                 </c:pt>
                 <c:pt idx="4">
-                  <c:v>0.0414590596992</c:v>
+                  <c:v>0.0362307838464</c:v>
                 </c:pt>
                 <c:pt idx="5">
-                  <c:v>0.0323625925152</c:v>
+                  <c:v>0.0317531500704</c:v>
                 </c:pt>
                 <c:pt idx="6">
-                  <c:v>0.02410147872</c:v>
+                  <c:v>0.0251741931264</c:v>
                 </c:pt>
                 <c:pt idx="7">
                   <c:v>0.0226438101504</c:v>
@@ -3911,7 +3911,7 @@
               </a:defRPr>
             </a:pPr>
             <a:r>
-              <a:t>1.27Q</a:t>
+              <a:t>1.22Q</a:t>
             </a:r>
           </a:p>
         </p:txBody>
@@ -4121,7 +4121,7 @@
               </a:defRPr>
             </a:pPr>
             <a:r>
-              <a:t>2026-07-30</a:t>
+              <a:t>2026-07-31</a:t>
             </a:r>
           </a:p>
         </p:txBody>
@@ -5277,7 +5277,7 @@
               </a:defRPr>
             </a:pPr>
             <a:r>
-              <a:t>2026-07-30</a:t>
+              <a:t>2026-07-31</a:t>
             </a:r>
           </a:p>
         </p:txBody>
@@ -5648,7 +5648,7 @@
               </a:defRPr>
             </a:pPr>
             <a:r>
-              <a:t>Base case reaches 1.27Q generated output tokens/day by 2030.</a:t>
+              <a:t>Base case reaches 1.22Q generated output tokens/day by 2030.</a:t>
             </a:r>
           </a:p>
         </p:txBody>
@@ -6133,7 +6133,7 @@
               </a:defRPr>
             </a:pPr>
             <a:r>
-              <a:t>2026-07-30</a:t>
+              <a:t>2026-07-31</a:t>
             </a:r>
           </a:p>
         </p:txBody>
@@ -6510,7 +6510,7 @@
               </a:defRPr>
             </a:pPr>
             <a:r>
-              <a:t>Base 2026-2030 growth: 6.0x</a:t>
+              <a:t>Base 2026-2030 growth: 6.1x</a:t>
             </a:r>
           </a:p>
         </p:txBody>
@@ -6660,7 +6660,7 @@
               </a:defRPr>
             </a:pPr>
             <a:r>
-              <a:t>2026-07-30</a:t>
+              <a:t>2026-07-31</a:t>
             </a:r>
           </a:p>
         </p:txBody>
@@ -7294,7 +7294,7 @@
               </a:defRPr>
             </a:pPr>
             <a:r>
-              <a:t>2026-07-30</a:t>
+              <a:t>2026-07-31</a:t>
             </a:r>
           </a:p>
         </p:txBody>
@@ -8488,7 +8488,7 @@
               </a:defRPr>
             </a:pPr>
             <a:r>
-              <a:t>2026-07-30</a:t>
+              <a:t>2026-07-31</a:t>
             </a:r>
           </a:p>
         </p:txBody>
@@ -9070,7 +9070,7 @@
               </a:defRPr>
             </a:pPr>
             <a:r>
-              <a:t>2026-07-30</a:t>
+              <a:t>2026-07-31</a:t>
             </a:r>
           </a:p>
         </p:txBody>
@@ -9939,7 +9939,7 @@
               </a:defRPr>
             </a:pPr>
             <a:r>
-              <a:t>2026-07-30</a:t>
+              <a:t>2026-07-31</a:t>
             </a:r>
           </a:p>
         </p:txBody>
@@ -10713,7 +10713,7 @@
               </a:defRPr>
             </a:pPr>
             <a:r>
-              <a:t>2026-07-30</a:t>
+              <a:t>2026-07-31</a:t>
             </a:r>
           </a:p>
         </p:txBody>
@@ -11466,7 +11466,7 @@
               </a:defRPr>
             </a:pPr>
             <a:r>
-              <a:t>2026-07-30</a:t>
+              <a:t>2026-07-31</a:t>
             </a:r>
           </a:p>
         </p:txBody>
